--- a/Teaching/Compile Time Errrors/problem_session_1.pptx
+++ b/Teaching/Compile Time Errrors/problem_session_1.pptx
@@ -2815,1250 +2815,112 @@
       </p:sp>
       <p:sp>
         <p:nvSpPr>
-          <p:cNvPr id="3" name="Text 1"/>
-          <p:cNvSpPr/>
-          <p:nvPr/>
-        </p:nvSpPr>
-        <p:spPr>
-          <a:xfrm>
-            <a:off x="381000" y="1905149"/>
-            <a:ext cx="5401818" cy="266700"/>
-          </a:xfrm>
-          <a:prstGeom prst="rect">
-            <a:avLst/>
-          </a:prstGeom>
-          <a:noFill/>
-          <a:ln/>
-        </p:spPr>
-        <p:txBody>
-          <a:bodyPr wrap="square" lIns="0" tIns="0" rIns="0" bIns="0" rtlCol="0" anchor="t"/>
-          <a:lstStyle/>
-          <a:p>
-            <a:pPr marL="0" indent="0" algn="l">
-              <a:lnSpc>
-                <a:spcPts val="2100"/>
-              </a:lnSpc>
-              <a:spcAft>
-                <a:spcPts val="1200"/>
-              </a:spcAft>
-              <a:buNone/>
-            </a:pPr>
-            <a:r>
-              <a:rPr lang="en-US" sz="1500" b="1" dirty="0">
-                <a:solidFill>
-                  <a:srgbClr val="2A9D8F"/>
-                </a:solidFill>
-                <a:latin typeface="Arial" pitchFamily="34" charset="0"/>
-                <a:ea typeface="Arial" pitchFamily="34" charset="-122"/>
-                <a:cs typeface="Arial" pitchFamily="34" charset="-120"/>
-              </a:rPr>
-              <a:t>Zero (for basic operations)</a:t>
-            </a:r>
-            <a:endParaRPr lang="en-US" sz="1500" dirty="0"/>
-          </a:p>
-        </p:txBody>
-      </p:sp>
-      <p:sp>
-        <p:nvSpPr>
-          <p:cNvPr id="4" name="Text 2"/>
-          <p:cNvSpPr/>
-          <p:nvPr/>
-        </p:nvSpPr>
-        <p:spPr>
-          <a:xfrm>
-            <a:off x="381000" y="2476649"/>
-            <a:ext cx="5295900" cy="1333054"/>
-          </a:xfrm>
-          <a:prstGeom prst="roundRect">
-            <a:avLst>
-              <a:gd name="adj" fmla="val 5716"/>
-            </a:avLst>
-          </a:prstGeom>
-          <a:solidFill>
-            <a:srgbClr val="0D0D1A"/>
-          </a:solidFill>
-          <a:ln/>
-        </p:spPr>
-        <p:txBody>
-          <a:bodyPr wrap="square" rtlCol="0" anchor="ctr"/>
-          <a:lstStyle/>
-          <a:p>
-            <a:pPr marL="0" indent="0">
-              <a:buNone/>
-            </a:pPr>
-            <a:endParaRPr lang="en-US" dirty="0"/>
-          </a:p>
-        </p:txBody>
-      </p:sp>
-      <p:sp>
-        <p:nvSpPr>
-          <p:cNvPr id="5" name="Shape 3"/>
-          <p:cNvSpPr/>
-          <p:nvPr/>
-        </p:nvSpPr>
-        <p:spPr>
-          <a:xfrm>
-            <a:off x="552450" y="2837557"/>
-            <a:ext cx="4953000" cy="0"/>
-          </a:xfrm>
-          <a:prstGeom prst="line">
-            <a:avLst/>
-          </a:prstGeom>
-          <a:noFill/>
-          <a:ln w="9525">
-            <a:solidFill>
-              <a:srgbClr val="3D3D5C"/>
-            </a:solidFill>
-            <a:prstDash val="solid"/>
-          </a:ln>
-        </p:spPr>
-        <p:txBody>
-          <a:bodyPr/>
-          <a:lstStyle/>
-          <a:p>
-            <a:endParaRPr lang="en-US"/>
-          </a:p>
-        </p:txBody>
-      </p:sp>
-      <p:sp>
-        <p:nvSpPr>
-          <p:cNvPr id="6" name="Text 4"/>
-          <p:cNvSpPr/>
-          <p:nvPr/>
-        </p:nvSpPr>
-        <p:spPr>
-          <a:xfrm>
-            <a:off x="552450" y="2609999"/>
-            <a:ext cx="971550" cy="146596"/>
-          </a:xfrm>
-          <a:prstGeom prst="rect">
-            <a:avLst/>
-          </a:prstGeom>
-          <a:noFill/>
-          <a:ln/>
-        </p:spPr>
-        <p:txBody>
-          <a:bodyPr wrap="square" lIns="0" tIns="0" rIns="0" bIns="0" rtlCol="0" anchor="t"/>
-          <a:lstStyle/>
-          <a:p>
-            <a:pPr marL="0" indent="0" algn="l">
-              <a:lnSpc>
-                <a:spcPts val="1155"/>
-              </a:lnSpc>
-              <a:buNone/>
-            </a:pPr>
-            <a:r>
-              <a:rPr lang="en-US" sz="825" dirty="0">
-                <a:solidFill>
-                  <a:srgbClr val="A8A8B8"/>
-                </a:solidFill>
-                <a:latin typeface="Arial" pitchFamily="34" charset="0"/>
-                <a:ea typeface="Arial" pitchFamily="34" charset="-122"/>
-                <a:cs typeface="Arial" pitchFamily="34" charset="-120"/>
-              </a:rPr>
-              <a:t>Operation</a:t>
-            </a:r>
-            <a:endParaRPr lang="en-US" sz="825" dirty="0"/>
-          </a:p>
-        </p:txBody>
-      </p:sp>
-      <p:sp>
-        <p:nvSpPr>
-          <p:cNvPr id="7" name="Text 5"/>
-          <p:cNvSpPr/>
-          <p:nvPr/>
-        </p:nvSpPr>
-        <p:spPr>
-          <a:xfrm>
-            <a:off x="1565910" y="2609999"/>
-            <a:ext cx="777240" cy="146596"/>
-          </a:xfrm>
-          <a:prstGeom prst="rect">
-            <a:avLst/>
-          </a:prstGeom>
-          <a:noFill/>
-          <a:ln/>
-        </p:spPr>
-        <p:txBody>
-          <a:bodyPr wrap="square" lIns="0" tIns="0" rIns="0" bIns="0" rtlCol="0" anchor="t"/>
-          <a:lstStyle/>
-          <a:p>
-            <a:pPr marL="0" indent="0" algn="r">
-              <a:lnSpc>
-                <a:spcPts val="1155"/>
-              </a:lnSpc>
-              <a:buNone/>
-            </a:pPr>
-            <a:r>
-              <a:rPr lang="en-US" sz="825" dirty="0">
-                <a:solidFill>
-                  <a:srgbClr val="A8A8B8"/>
-                </a:solidFill>
-                <a:latin typeface="Arial" pitchFamily="34" charset="0"/>
-                <a:ea typeface="Arial" pitchFamily="34" charset="-122"/>
-                <a:cs typeface="Arial" pitchFamily="34" charset="-120"/>
-              </a:rPr>
-              <a:t>StrongId</a:t>
-            </a:r>
-            <a:endParaRPr lang="en-US" sz="825" dirty="0"/>
-          </a:p>
-        </p:txBody>
-      </p:sp>
-      <p:sp>
-        <p:nvSpPr>
-          <p:cNvPr id="8" name="Text 6"/>
-          <p:cNvSpPr/>
-          <p:nvPr/>
-        </p:nvSpPr>
-        <p:spPr>
-          <a:xfrm>
-            <a:off x="2404110" y="2609999"/>
-            <a:ext cx="777240" cy="146596"/>
-          </a:xfrm>
-          <a:prstGeom prst="rect">
-            <a:avLst/>
-          </a:prstGeom>
-          <a:noFill/>
-          <a:ln/>
-        </p:spPr>
-        <p:txBody>
-          <a:bodyPr wrap="square" lIns="0" tIns="0" rIns="0" bIns="0" rtlCol="0" anchor="t"/>
-          <a:lstStyle/>
-          <a:p>
-            <a:pPr marL="0" indent="0" algn="r">
-              <a:lnSpc>
-                <a:spcPts val="1155"/>
-              </a:lnSpc>
-              <a:buNone/>
-            </a:pPr>
-            <a:r>
-              <a:rPr lang="en-US" sz="825" dirty="0">
-                <a:solidFill>
-                  <a:srgbClr val="A8A8B8"/>
-                </a:solidFill>
-                <a:latin typeface="Arial" pitchFamily="34" charset="0"/>
-                <a:ea typeface="Arial" pitchFamily="34" charset="-122"/>
-                <a:cs typeface="Arial" pitchFamily="34" charset="-120"/>
-              </a:rPr>
-              <a:t>Raw int</a:t>
-            </a:r>
-            <a:endParaRPr lang="en-US" sz="825" dirty="0"/>
-          </a:p>
-        </p:txBody>
-      </p:sp>
-      <p:sp>
-        <p:nvSpPr>
-          <p:cNvPr id="9" name="Text 7"/>
-          <p:cNvSpPr/>
-          <p:nvPr/>
-        </p:nvSpPr>
-        <p:spPr>
-          <a:xfrm>
-            <a:off x="3246120" y="2609999"/>
-            <a:ext cx="582930" cy="146596"/>
-          </a:xfrm>
-          <a:prstGeom prst="rect">
-            <a:avLst/>
-          </a:prstGeom>
-          <a:noFill/>
-          <a:ln/>
-        </p:spPr>
-        <p:txBody>
-          <a:bodyPr wrap="square" lIns="0" tIns="0" rIns="0" bIns="0" rtlCol="0" anchor="t"/>
-          <a:lstStyle/>
-          <a:p>
-            <a:pPr marL="0" indent="0" algn="r">
-              <a:lnSpc>
-                <a:spcPts val="1155"/>
-              </a:lnSpc>
-              <a:buNone/>
-            </a:pPr>
-            <a:r>
-              <a:rPr lang="en-US" sz="825" dirty="0">
-                <a:solidFill>
-                  <a:srgbClr val="2A9D8F"/>
-                </a:solidFill>
-                <a:latin typeface="Arial" pitchFamily="34" charset="0"/>
-                <a:ea typeface="Arial" pitchFamily="34" charset="-122"/>
-                <a:cs typeface="Arial" pitchFamily="34" charset="-120"/>
-              </a:rPr>
-              <a:t>Ratio</a:t>
-            </a:r>
-            <a:endParaRPr lang="en-US" sz="825" dirty="0"/>
-          </a:p>
-        </p:txBody>
-      </p:sp>
-      <p:sp>
-        <p:nvSpPr>
-          <p:cNvPr id="10" name="Text 8"/>
-          <p:cNvSpPr/>
-          <p:nvPr/>
-        </p:nvSpPr>
-        <p:spPr>
-          <a:xfrm>
-            <a:off x="552450" y="2918520"/>
-            <a:ext cx="971550" cy="146596"/>
-          </a:xfrm>
-          <a:prstGeom prst="rect">
-            <a:avLst/>
-          </a:prstGeom>
-          <a:noFill/>
-          <a:ln/>
-        </p:spPr>
-        <p:txBody>
-          <a:bodyPr wrap="square" lIns="0" tIns="0" rIns="0" bIns="0" rtlCol="0" anchor="t"/>
-          <a:lstStyle/>
-          <a:p>
-            <a:pPr marL="0" indent="0" algn="l">
-              <a:lnSpc>
-                <a:spcPts val="1155"/>
-              </a:lnSpc>
-              <a:buNone/>
-            </a:pPr>
-            <a:r>
-              <a:rPr lang="en-US" sz="825" dirty="0">
-                <a:solidFill>
-                  <a:srgbClr val="EAEAEA"/>
-                </a:solidFill>
-                <a:latin typeface="Arial" pitchFamily="34" charset="0"/>
-                <a:ea typeface="Arial" pitchFamily="34" charset="-122"/>
-                <a:cs typeface="Arial" pitchFamily="34" charset="-120"/>
-              </a:rPr>
-              <a:t>Construction</a:t>
-            </a:r>
-            <a:endParaRPr lang="en-US" sz="825" dirty="0"/>
-          </a:p>
-        </p:txBody>
-      </p:sp>
-      <p:sp>
-        <p:nvSpPr>
-          <p:cNvPr id="11" name="Text 9"/>
-          <p:cNvSpPr/>
-          <p:nvPr/>
-        </p:nvSpPr>
-        <p:spPr>
-          <a:xfrm>
-            <a:off x="1565910" y="2918520"/>
-            <a:ext cx="777240" cy="146596"/>
-          </a:xfrm>
-          <a:prstGeom prst="rect">
-            <a:avLst/>
-          </a:prstGeom>
-          <a:noFill/>
-          <a:ln/>
-        </p:spPr>
-        <p:txBody>
-          <a:bodyPr wrap="square" lIns="0" tIns="0" rIns="0" bIns="0" rtlCol="0" anchor="t"/>
-          <a:lstStyle/>
-          <a:p>
-            <a:pPr marL="0" indent="0" algn="r">
-              <a:lnSpc>
-                <a:spcPts val="1155"/>
-              </a:lnSpc>
-              <a:buNone/>
-            </a:pPr>
-            <a:r>
-              <a:rPr lang="en-US" sz="825" dirty="0">
-                <a:solidFill>
-                  <a:srgbClr val="EAEAEA"/>
-                </a:solidFill>
-                <a:latin typeface="Arial" pitchFamily="34" charset="0"/>
-                <a:ea typeface="Arial" pitchFamily="34" charset="-122"/>
-                <a:cs typeface="Arial" pitchFamily="34" charset="-120"/>
-              </a:rPr>
-              <a:t>0.09 ns</a:t>
-            </a:r>
-            <a:endParaRPr lang="en-US" sz="825" dirty="0"/>
-          </a:p>
-        </p:txBody>
-      </p:sp>
-      <p:sp>
-        <p:nvSpPr>
-          <p:cNvPr id="12" name="Text 10"/>
-          <p:cNvSpPr/>
-          <p:nvPr/>
-        </p:nvSpPr>
-        <p:spPr>
-          <a:xfrm>
-            <a:off x="2404110" y="2918520"/>
-            <a:ext cx="777240" cy="146596"/>
-          </a:xfrm>
-          <a:prstGeom prst="rect">
-            <a:avLst/>
-          </a:prstGeom>
-          <a:noFill/>
-          <a:ln/>
-        </p:spPr>
-        <p:txBody>
-          <a:bodyPr wrap="square" lIns="0" tIns="0" rIns="0" bIns="0" rtlCol="0" anchor="t"/>
-          <a:lstStyle/>
-          <a:p>
-            <a:pPr marL="0" indent="0" algn="r">
-              <a:lnSpc>
-                <a:spcPts val="1155"/>
-              </a:lnSpc>
-              <a:buNone/>
-            </a:pPr>
-            <a:r>
-              <a:rPr lang="en-US" sz="825" dirty="0">
-                <a:solidFill>
-                  <a:srgbClr val="EAEAEA"/>
-                </a:solidFill>
-                <a:latin typeface="Arial" pitchFamily="34" charset="0"/>
-                <a:ea typeface="Arial" pitchFamily="34" charset="-122"/>
-                <a:cs typeface="Arial" pitchFamily="34" charset="-120"/>
-              </a:rPr>
-              <a:t>0.09 ns</a:t>
-            </a:r>
-            <a:endParaRPr lang="en-US" sz="825" dirty="0"/>
-          </a:p>
-        </p:txBody>
-      </p:sp>
-      <p:sp>
-        <p:nvSpPr>
-          <p:cNvPr id="13" name="Text 11"/>
-          <p:cNvSpPr/>
-          <p:nvPr/>
-        </p:nvSpPr>
-        <p:spPr>
-          <a:xfrm>
-            <a:off x="3246120" y="2918520"/>
-            <a:ext cx="582930" cy="146596"/>
-          </a:xfrm>
-          <a:prstGeom prst="rect">
-            <a:avLst/>
-          </a:prstGeom>
-          <a:noFill/>
-          <a:ln/>
-        </p:spPr>
-        <p:txBody>
-          <a:bodyPr wrap="square" lIns="0" tIns="0" rIns="0" bIns="0" rtlCol="0" anchor="t"/>
-          <a:lstStyle/>
-          <a:p>
-            <a:pPr marL="0" indent="0" algn="r">
-              <a:lnSpc>
-                <a:spcPts val="1155"/>
-              </a:lnSpc>
-              <a:buNone/>
-            </a:pPr>
-            <a:r>
-              <a:rPr lang="en-US" sz="825" dirty="0">
-                <a:solidFill>
-                  <a:srgbClr val="2A9D8F"/>
-                </a:solidFill>
-                <a:latin typeface="Arial" pitchFamily="34" charset="0"/>
-                <a:ea typeface="Arial" pitchFamily="34" charset="-122"/>
-                <a:cs typeface="Arial" pitchFamily="34" charset="-120"/>
-              </a:rPr>
-              <a:t>1.00×</a:t>
-            </a:r>
-            <a:endParaRPr lang="en-US" sz="825" dirty="0"/>
-          </a:p>
-        </p:txBody>
-      </p:sp>
-      <p:sp>
-        <p:nvSpPr>
-          <p:cNvPr id="14" name="Text 12"/>
-          <p:cNvSpPr/>
-          <p:nvPr/>
-        </p:nvSpPr>
-        <p:spPr>
-          <a:xfrm>
-            <a:off x="552450" y="3122265"/>
-            <a:ext cx="971550" cy="146596"/>
-          </a:xfrm>
-          <a:prstGeom prst="rect">
-            <a:avLst/>
-          </a:prstGeom>
-          <a:noFill/>
-          <a:ln/>
-        </p:spPr>
-        <p:txBody>
-          <a:bodyPr wrap="square" lIns="0" tIns="0" rIns="0" bIns="0" rtlCol="0" anchor="t"/>
-          <a:lstStyle/>
-          <a:p>
-            <a:pPr marL="0" indent="0" algn="l">
-              <a:lnSpc>
-                <a:spcPts val="1155"/>
-              </a:lnSpc>
-              <a:buNone/>
-            </a:pPr>
-            <a:r>
-              <a:rPr lang="en-US" sz="825" dirty="0">
-                <a:solidFill>
-                  <a:srgbClr val="EAEAEA"/>
-                </a:solidFill>
-                <a:latin typeface="Arial" pitchFamily="34" charset="0"/>
-                <a:ea typeface="Arial" pitchFamily="34" charset="-122"/>
-                <a:cs typeface="Arial" pitchFamily="34" charset="-120"/>
-              </a:rPr>
-              <a:t>Comparison</a:t>
-            </a:r>
-            <a:endParaRPr lang="en-US" sz="825" dirty="0"/>
-          </a:p>
-        </p:txBody>
-      </p:sp>
-      <p:sp>
-        <p:nvSpPr>
-          <p:cNvPr id="15" name="Text 13"/>
-          <p:cNvSpPr/>
-          <p:nvPr/>
-        </p:nvSpPr>
-        <p:spPr>
-          <a:xfrm>
-            <a:off x="1565910" y="3122265"/>
-            <a:ext cx="777240" cy="146596"/>
-          </a:xfrm>
-          <a:prstGeom prst="rect">
-            <a:avLst/>
-          </a:prstGeom>
-          <a:noFill/>
-          <a:ln/>
-        </p:spPr>
-        <p:txBody>
-          <a:bodyPr wrap="square" lIns="0" tIns="0" rIns="0" bIns="0" rtlCol="0" anchor="t"/>
-          <a:lstStyle/>
-          <a:p>
-            <a:pPr marL="0" indent="0" algn="r">
-              <a:lnSpc>
-                <a:spcPts val="1155"/>
-              </a:lnSpc>
-              <a:buNone/>
-            </a:pPr>
-            <a:r>
-              <a:rPr lang="en-US" sz="825" dirty="0">
-                <a:solidFill>
-                  <a:srgbClr val="EAEAEA"/>
-                </a:solidFill>
-                <a:latin typeface="Arial" pitchFamily="34" charset="0"/>
-                <a:ea typeface="Arial" pitchFamily="34" charset="-122"/>
-                <a:cs typeface="Arial" pitchFamily="34" charset="-120"/>
-              </a:rPr>
-              <a:t>0.37 ns</a:t>
-            </a:r>
-            <a:endParaRPr lang="en-US" sz="825" dirty="0"/>
-          </a:p>
-        </p:txBody>
-      </p:sp>
-      <p:sp>
-        <p:nvSpPr>
-          <p:cNvPr id="16" name="Text 14"/>
-          <p:cNvSpPr/>
-          <p:nvPr/>
-        </p:nvSpPr>
-        <p:spPr>
-          <a:xfrm>
-            <a:off x="2404110" y="3122265"/>
-            <a:ext cx="777240" cy="146596"/>
-          </a:xfrm>
-          <a:prstGeom prst="rect">
-            <a:avLst/>
-          </a:prstGeom>
-          <a:noFill/>
-          <a:ln/>
-        </p:spPr>
-        <p:txBody>
-          <a:bodyPr wrap="square" lIns="0" tIns="0" rIns="0" bIns="0" rtlCol="0" anchor="t"/>
-          <a:lstStyle/>
-          <a:p>
-            <a:pPr marL="0" indent="0" algn="r">
-              <a:lnSpc>
-                <a:spcPts val="1155"/>
-              </a:lnSpc>
-              <a:buNone/>
-            </a:pPr>
-            <a:r>
-              <a:rPr lang="en-US" sz="825" dirty="0">
-                <a:solidFill>
-                  <a:srgbClr val="EAEAEA"/>
-                </a:solidFill>
-                <a:latin typeface="Arial" pitchFamily="34" charset="0"/>
-                <a:ea typeface="Arial" pitchFamily="34" charset="-122"/>
-                <a:cs typeface="Arial" pitchFamily="34" charset="-120"/>
-              </a:rPr>
-              <a:t>0.37 ns</a:t>
-            </a:r>
-            <a:endParaRPr lang="en-US" sz="825" dirty="0"/>
-          </a:p>
-        </p:txBody>
-      </p:sp>
-      <p:sp>
-        <p:nvSpPr>
-          <p:cNvPr id="17" name="Text 15"/>
-          <p:cNvSpPr/>
-          <p:nvPr/>
-        </p:nvSpPr>
-        <p:spPr>
-          <a:xfrm>
-            <a:off x="3246120" y="3122265"/>
-            <a:ext cx="582930" cy="146596"/>
-          </a:xfrm>
-          <a:prstGeom prst="rect">
-            <a:avLst/>
-          </a:prstGeom>
-          <a:noFill/>
-          <a:ln/>
-        </p:spPr>
-        <p:txBody>
-          <a:bodyPr wrap="square" lIns="0" tIns="0" rIns="0" bIns="0" rtlCol="0" anchor="t"/>
-          <a:lstStyle/>
-          <a:p>
-            <a:pPr marL="0" indent="0" algn="r">
-              <a:lnSpc>
-                <a:spcPts val="1155"/>
-              </a:lnSpc>
-              <a:buNone/>
-            </a:pPr>
-            <a:r>
-              <a:rPr lang="en-US" sz="825" dirty="0">
-                <a:solidFill>
-                  <a:srgbClr val="2A9D8F"/>
-                </a:solidFill>
-                <a:latin typeface="Arial" pitchFamily="34" charset="0"/>
-                <a:ea typeface="Arial" pitchFamily="34" charset="-122"/>
-                <a:cs typeface="Arial" pitchFamily="34" charset="-120"/>
-              </a:rPr>
-              <a:t>1.00×</a:t>
-            </a:r>
-            <a:endParaRPr lang="en-US" sz="825" dirty="0"/>
-          </a:p>
-        </p:txBody>
-      </p:sp>
-      <p:sp>
-        <p:nvSpPr>
-          <p:cNvPr id="18" name="Text 16"/>
-          <p:cNvSpPr/>
-          <p:nvPr/>
-        </p:nvSpPr>
-        <p:spPr>
-          <a:xfrm>
-            <a:off x="552450" y="3326011"/>
-            <a:ext cx="971550" cy="146596"/>
-          </a:xfrm>
-          <a:prstGeom prst="rect">
-            <a:avLst/>
-          </a:prstGeom>
-          <a:noFill/>
-          <a:ln/>
-        </p:spPr>
-        <p:txBody>
-          <a:bodyPr wrap="square" lIns="0" tIns="0" rIns="0" bIns="0" rtlCol="0" anchor="t"/>
-          <a:lstStyle/>
-          <a:p>
-            <a:pPr marL="0" indent="0" algn="l">
-              <a:lnSpc>
-                <a:spcPts val="1155"/>
-              </a:lnSpc>
-              <a:buNone/>
-            </a:pPr>
-            <a:r>
-              <a:rPr lang="en-US" sz="825" dirty="0">
-                <a:solidFill>
-                  <a:srgbClr val="EAEAEA"/>
-                </a:solidFill>
-                <a:latin typeface="Arial" pitchFamily="34" charset="0"/>
-                <a:ea typeface="Arial" pitchFamily="34" charset="-122"/>
-                <a:cs typeface="Arial" pitchFamily="34" charset="-120"/>
-              </a:rPr>
-              <a:t>Addition</a:t>
-            </a:r>
-            <a:endParaRPr lang="en-US" sz="825" dirty="0"/>
-          </a:p>
-        </p:txBody>
-      </p:sp>
-      <p:sp>
-        <p:nvSpPr>
-          <p:cNvPr id="19" name="Text 17"/>
-          <p:cNvSpPr/>
-          <p:nvPr/>
-        </p:nvSpPr>
-        <p:spPr>
-          <a:xfrm>
-            <a:off x="1565910" y="3326011"/>
-            <a:ext cx="777240" cy="146596"/>
-          </a:xfrm>
-          <a:prstGeom prst="rect">
-            <a:avLst/>
-          </a:prstGeom>
-          <a:noFill/>
-          <a:ln/>
-        </p:spPr>
-        <p:txBody>
-          <a:bodyPr wrap="square" lIns="0" tIns="0" rIns="0" bIns="0" rtlCol="0" anchor="t"/>
-          <a:lstStyle/>
-          <a:p>
-            <a:pPr marL="0" indent="0" algn="r">
-              <a:lnSpc>
-                <a:spcPts val="1155"/>
-              </a:lnSpc>
-              <a:buNone/>
-            </a:pPr>
-            <a:r>
-              <a:rPr lang="en-US" sz="825" dirty="0">
-                <a:solidFill>
-                  <a:srgbClr val="EAEAEA"/>
-                </a:solidFill>
-                <a:latin typeface="Arial" pitchFamily="34" charset="0"/>
-                <a:ea typeface="Arial" pitchFamily="34" charset="-122"/>
-                <a:cs typeface="Arial" pitchFamily="34" charset="-120"/>
-              </a:rPr>
-              <a:t>0.93 ns</a:t>
-            </a:r>
-            <a:endParaRPr lang="en-US" sz="825" dirty="0"/>
-          </a:p>
-        </p:txBody>
-      </p:sp>
-      <p:sp>
-        <p:nvSpPr>
-          <p:cNvPr id="20" name="Text 18"/>
-          <p:cNvSpPr/>
-          <p:nvPr/>
-        </p:nvSpPr>
-        <p:spPr>
-          <a:xfrm>
-            <a:off x="2404110" y="3326011"/>
-            <a:ext cx="777240" cy="146596"/>
-          </a:xfrm>
-          <a:prstGeom prst="rect">
-            <a:avLst/>
-          </a:prstGeom>
-          <a:noFill/>
-          <a:ln/>
-        </p:spPr>
-        <p:txBody>
-          <a:bodyPr wrap="square" lIns="0" tIns="0" rIns="0" bIns="0" rtlCol="0" anchor="t"/>
-          <a:lstStyle/>
-          <a:p>
-            <a:pPr marL="0" indent="0" algn="r">
-              <a:lnSpc>
-                <a:spcPts val="1155"/>
-              </a:lnSpc>
-              <a:buNone/>
-            </a:pPr>
-            <a:r>
-              <a:rPr lang="en-US" sz="825" dirty="0">
-                <a:solidFill>
-                  <a:srgbClr val="EAEAEA"/>
-                </a:solidFill>
-                <a:latin typeface="Arial" pitchFamily="34" charset="0"/>
-                <a:ea typeface="Arial" pitchFamily="34" charset="-122"/>
-                <a:cs typeface="Arial" pitchFamily="34" charset="-120"/>
-              </a:rPr>
-              <a:t>0.93 ns</a:t>
-            </a:r>
-            <a:endParaRPr lang="en-US" sz="825" dirty="0"/>
-          </a:p>
-        </p:txBody>
-      </p:sp>
-      <p:sp>
-        <p:nvSpPr>
-          <p:cNvPr id="21" name="Text 19"/>
-          <p:cNvSpPr/>
-          <p:nvPr/>
-        </p:nvSpPr>
-        <p:spPr>
-          <a:xfrm>
-            <a:off x="3246120" y="3326011"/>
-            <a:ext cx="582930" cy="146596"/>
-          </a:xfrm>
-          <a:prstGeom prst="rect">
-            <a:avLst/>
-          </a:prstGeom>
-          <a:noFill/>
-          <a:ln/>
-        </p:spPr>
-        <p:txBody>
-          <a:bodyPr wrap="square" lIns="0" tIns="0" rIns="0" bIns="0" rtlCol="0" anchor="t"/>
-          <a:lstStyle/>
-          <a:p>
-            <a:pPr marL="0" indent="0" algn="r">
-              <a:lnSpc>
-                <a:spcPts val="1155"/>
-              </a:lnSpc>
-              <a:buNone/>
-            </a:pPr>
-            <a:r>
-              <a:rPr lang="en-US" sz="825" dirty="0">
-                <a:solidFill>
-                  <a:srgbClr val="2A9D8F"/>
-                </a:solidFill>
-                <a:latin typeface="Arial" pitchFamily="34" charset="0"/>
-                <a:ea typeface="Arial" pitchFamily="34" charset="-122"/>
-                <a:cs typeface="Arial" pitchFamily="34" charset="-120"/>
-              </a:rPr>
-              <a:t>1.00×</a:t>
-            </a:r>
-            <a:endParaRPr lang="en-US" sz="825" dirty="0"/>
-          </a:p>
-        </p:txBody>
-      </p:sp>
-      <p:sp>
-        <p:nvSpPr>
-          <p:cNvPr id="22" name="Text 20"/>
-          <p:cNvSpPr/>
-          <p:nvPr/>
-        </p:nvSpPr>
-        <p:spPr>
-          <a:xfrm>
-            <a:off x="552450" y="3529757"/>
-            <a:ext cx="971550" cy="146596"/>
-          </a:xfrm>
-          <a:prstGeom prst="rect">
-            <a:avLst/>
-          </a:prstGeom>
-          <a:noFill/>
-          <a:ln/>
-        </p:spPr>
-        <p:txBody>
-          <a:bodyPr wrap="square" lIns="0" tIns="0" rIns="0" bIns="0" rtlCol="0" anchor="t"/>
-          <a:lstStyle/>
-          <a:p>
-            <a:pPr marL="0" indent="0" algn="l">
-              <a:lnSpc>
-                <a:spcPts val="1155"/>
-              </a:lnSpc>
-              <a:buNone/>
-            </a:pPr>
-            <a:r>
-              <a:rPr lang="en-US" sz="825" dirty="0">
-                <a:solidFill>
-                  <a:srgbClr val="EAEAEA"/>
-                </a:solidFill>
-                <a:latin typeface="Arial" pitchFamily="34" charset="0"/>
-                <a:ea typeface="Arial" pitchFamily="34" charset="-122"/>
-                <a:cs typeface="Arial" pitchFamily="34" charset="-120"/>
-              </a:rPr>
-              <a:t>Hash</a:t>
-            </a:r>
-            <a:endParaRPr lang="en-US" sz="825" dirty="0"/>
-          </a:p>
-        </p:txBody>
-      </p:sp>
-      <p:sp>
-        <p:nvSpPr>
-          <p:cNvPr id="23" name="Text 21"/>
-          <p:cNvSpPr/>
-          <p:nvPr/>
-        </p:nvSpPr>
-        <p:spPr>
-          <a:xfrm>
-            <a:off x="1565910" y="3529757"/>
-            <a:ext cx="777240" cy="146596"/>
-          </a:xfrm>
-          <a:prstGeom prst="rect">
-            <a:avLst/>
-          </a:prstGeom>
-          <a:noFill/>
-          <a:ln/>
-        </p:spPr>
-        <p:txBody>
-          <a:bodyPr wrap="square" lIns="0" tIns="0" rIns="0" bIns="0" rtlCol="0" anchor="t"/>
-          <a:lstStyle/>
-          <a:p>
-            <a:pPr marL="0" indent="0" algn="r">
-              <a:lnSpc>
-                <a:spcPts val="1155"/>
-              </a:lnSpc>
-              <a:buNone/>
-            </a:pPr>
-            <a:r>
-              <a:rPr lang="en-US" sz="825" dirty="0">
-                <a:solidFill>
-                  <a:srgbClr val="EAEAEA"/>
-                </a:solidFill>
-                <a:latin typeface="Arial" pitchFamily="34" charset="0"/>
-                <a:ea typeface="Arial" pitchFamily="34" charset="-122"/>
-                <a:cs typeface="Arial" pitchFamily="34" charset="-120"/>
-              </a:rPr>
-              <a:t>0.59 ns</a:t>
-            </a:r>
-            <a:endParaRPr lang="en-US" sz="825" dirty="0"/>
-          </a:p>
-        </p:txBody>
-      </p:sp>
-      <p:sp>
-        <p:nvSpPr>
-          <p:cNvPr id="24" name="Text 22"/>
-          <p:cNvSpPr/>
-          <p:nvPr/>
-        </p:nvSpPr>
-        <p:spPr>
-          <a:xfrm>
-            <a:off x="2404110" y="3529757"/>
-            <a:ext cx="777240" cy="146596"/>
-          </a:xfrm>
-          <a:prstGeom prst="rect">
-            <a:avLst/>
-          </a:prstGeom>
-          <a:noFill/>
-          <a:ln/>
-        </p:spPr>
-        <p:txBody>
-          <a:bodyPr wrap="square" lIns="0" tIns="0" rIns="0" bIns="0" rtlCol="0" anchor="t"/>
-          <a:lstStyle/>
-          <a:p>
-            <a:pPr marL="0" indent="0" algn="r">
-              <a:lnSpc>
-                <a:spcPts val="1155"/>
-              </a:lnSpc>
-              <a:buNone/>
-            </a:pPr>
-            <a:r>
-              <a:rPr lang="en-US" sz="825" dirty="0">
-                <a:solidFill>
-                  <a:srgbClr val="EAEAEA"/>
-                </a:solidFill>
-                <a:latin typeface="Arial" pitchFamily="34" charset="0"/>
-                <a:ea typeface="Arial" pitchFamily="34" charset="-122"/>
-                <a:cs typeface="Arial" pitchFamily="34" charset="-120"/>
-              </a:rPr>
-              <a:t>0.59 ns</a:t>
-            </a:r>
-            <a:endParaRPr lang="en-US" sz="825" dirty="0"/>
-          </a:p>
-        </p:txBody>
-      </p:sp>
-      <p:sp>
-        <p:nvSpPr>
-          <p:cNvPr id="25" name="Text 23"/>
-          <p:cNvSpPr/>
-          <p:nvPr/>
-        </p:nvSpPr>
-        <p:spPr>
-          <a:xfrm>
-            <a:off x="3246120" y="3529757"/>
-            <a:ext cx="582930" cy="146596"/>
-          </a:xfrm>
-          <a:prstGeom prst="rect">
-            <a:avLst/>
-          </a:prstGeom>
-          <a:noFill/>
-          <a:ln/>
-        </p:spPr>
-        <p:txBody>
-          <a:bodyPr wrap="square" lIns="0" tIns="0" rIns="0" bIns="0" rtlCol="0" anchor="t"/>
-          <a:lstStyle/>
-          <a:p>
-            <a:pPr marL="0" indent="0" algn="r">
-              <a:lnSpc>
-                <a:spcPts val="1155"/>
-              </a:lnSpc>
-              <a:buNone/>
-            </a:pPr>
-            <a:r>
-              <a:rPr lang="en-US" sz="825" dirty="0">
-                <a:solidFill>
-                  <a:srgbClr val="2A9D8F"/>
-                </a:solidFill>
-                <a:latin typeface="Arial" pitchFamily="34" charset="0"/>
-                <a:ea typeface="Arial" pitchFamily="34" charset="-122"/>
-                <a:cs typeface="Arial" pitchFamily="34" charset="-120"/>
-              </a:rPr>
-              <a:t>1.00×</a:t>
-            </a:r>
-            <a:endParaRPr lang="en-US" sz="825" dirty="0"/>
-          </a:p>
-        </p:txBody>
-      </p:sp>
-      <p:sp>
-        <p:nvSpPr>
-          <p:cNvPr id="26" name="Text 24"/>
-          <p:cNvSpPr/>
-          <p:nvPr/>
-        </p:nvSpPr>
-        <p:spPr>
-          <a:xfrm>
-            <a:off x="5905500" y="1472654"/>
-            <a:ext cx="2857500" cy="1918246"/>
-          </a:xfrm>
-          <a:prstGeom prst="roundRect">
-            <a:avLst>
-              <a:gd name="adj" fmla="val 3972"/>
-            </a:avLst>
-          </a:prstGeom>
-          <a:solidFill>
-            <a:srgbClr val="2D2D44"/>
-          </a:solidFill>
-          <a:ln/>
-        </p:spPr>
-        <p:txBody>
-          <a:bodyPr wrap="square" rtlCol="0" anchor="ctr"/>
-          <a:lstStyle/>
-          <a:p>
-            <a:pPr marL="0" indent="0">
-              <a:buNone/>
-            </a:pPr>
-            <a:endParaRPr lang="en-US" dirty="0"/>
-          </a:p>
-        </p:txBody>
-      </p:sp>
-      <p:sp>
-        <p:nvSpPr>
-          <p:cNvPr id="27" name="Text 25"/>
-          <p:cNvSpPr/>
-          <p:nvPr/>
-        </p:nvSpPr>
-        <p:spPr>
-          <a:xfrm>
-            <a:off x="6076950" y="1606004"/>
-            <a:ext cx="2564892" cy="146596"/>
-          </a:xfrm>
-          <a:prstGeom prst="rect">
-            <a:avLst/>
-          </a:prstGeom>
-          <a:noFill/>
-          <a:ln/>
-        </p:spPr>
-        <p:txBody>
-          <a:bodyPr wrap="square" lIns="0" tIns="0" rIns="0" bIns="0" rtlCol="0" anchor="t"/>
-          <a:lstStyle/>
-          <a:p>
-            <a:pPr marL="0" indent="0" algn="l">
-              <a:lnSpc>
-                <a:spcPts val="1155"/>
-              </a:lnSpc>
-              <a:spcAft>
-                <a:spcPts val="450"/>
-              </a:spcAft>
-              <a:buNone/>
-            </a:pPr>
-            <a:r>
-              <a:rPr lang="en-US" sz="825" b="1" dirty="0">
-                <a:solidFill>
-                  <a:srgbClr val="2A9D8F"/>
-                </a:solidFill>
-                <a:latin typeface="Arial" pitchFamily="34" charset="0"/>
-                <a:ea typeface="Arial" pitchFamily="34" charset="-122"/>
-                <a:cs typeface="Arial" pitchFamily="34" charset="-120"/>
-              </a:rPr>
-              <a:t>Why zero overhead?</a:t>
-            </a:r>
-            <a:endParaRPr lang="en-US" sz="825" dirty="0"/>
-          </a:p>
-        </p:txBody>
-      </p:sp>
-      <p:sp>
-        <p:nvSpPr>
-          <p:cNvPr id="28" name="Text 26"/>
-          <p:cNvSpPr/>
-          <p:nvPr/>
-        </p:nvSpPr>
-        <p:spPr>
-          <a:xfrm>
-            <a:off x="6076950" y="1809750"/>
-            <a:ext cx="2514600" cy="1447800"/>
-          </a:xfrm>
-          <a:prstGeom prst="rect">
-            <a:avLst/>
-          </a:prstGeom>
-          <a:noFill/>
-          <a:ln/>
-        </p:spPr>
-        <p:txBody>
-          <a:bodyPr wrap="square" lIns="76200" tIns="0" rIns="0" bIns="0" rtlCol="0" anchor="t"/>
-          <a:lstStyle/>
-          <a:p>
-            <a:pPr marL="76200" indent="-76200" algn="l">
-              <a:lnSpc>
-                <a:spcPts val="2100"/>
-              </a:lnSpc>
-              <a:buSzPct val="100000"/>
-              <a:buChar char="•"/>
-            </a:pPr>
-            <a:r>
-              <a:rPr lang="en-US" sz="1350" dirty="0">
-                <a:solidFill>
-                  <a:srgbClr val="A8A8B8"/>
-                </a:solidFill>
-                <a:latin typeface="Arial" pitchFamily="34" charset="0"/>
-                <a:ea typeface="Arial" pitchFamily="34" charset="-122"/>
-                <a:cs typeface="Arial" pitchFamily="34" charset="-120"/>
-              </a:rPr>
-              <a:t>Single int member—same size</a:t>
-            </a:r>
-            <a:endParaRPr lang="en-US" sz="1350" dirty="0"/>
-          </a:p>
-          <a:p>
-            <a:pPr marL="76200" indent="-76200" algn="l">
-              <a:lnSpc>
-                <a:spcPts val="2100"/>
-              </a:lnSpc>
-              <a:buSzPct val="100000"/>
-              <a:buChar char="•"/>
-            </a:pPr>
-            <a:r>
-              <a:rPr lang="en-US" sz="1350" dirty="0">
-                <a:solidFill>
-                  <a:srgbClr val="A8A8B8"/>
-                </a:solidFill>
-                <a:latin typeface="Arial" pitchFamily="34" charset="0"/>
-                <a:ea typeface="Arial" pitchFamily="34" charset="-122"/>
-                <a:cs typeface="Arial" pitchFamily="34" charset="-120"/>
-              </a:rPr>
-              <a:t>Methods inline completely</a:t>
-            </a:r>
-            <a:endParaRPr lang="en-US" sz="1350" dirty="0"/>
-          </a:p>
-          <a:p>
-            <a:pPr marL="76200" indent="-76200" algn="l">
-              <a:lnSpc>
-                <a:spcPts val="2100"/>
-              </a:lnSpc>
-              <a:buSzPct val="100000"/>
-              <a:buChar char="•"/>
-            </a:pPr>
-            <a:r>
-              <a:rPr lang="en-US" sz="1350" dirty="0">
-                <a:solidFill>
-                  <a:srgbClr val="A8A8B8"/>
-                </a:solidFill>
-                <a:latin typeface="Arial" pitchFamily="34" charset="0"/>
-                <a:ea typeface="Arial" pitchFamily="34" charset="-122"/>
-                <a:cs typeface="Arial" pitchFamily="34" charset="-120"/>
-              </a:rPr>
-              <a:t>Tag exists only at compile time</a:t>
-            </a:r>
-            <a:endParaRPr lang="en-US" sz="1350" dirty="0"/>
-          </a:p>
-          <a:p>
-            <a:pPr marL="76200" indent="-76200" algn="l">
-              <a:lnSpc>
-                <a:spcPts val="2100"/>
-              </a:lnSpc>
-              <a:buSzPct val="100000"/>
-              <a:buChar char="•"/>
-            </a:pPr>
-            <a:r>
-              <a:rPr lang="en-US" sz="1350" dirty="0">
-                <a:solidFill>
-                  <a:srgbClr val="A8A8B8"/>
-                </a:solidFill>
-                <a:latin typeface="Arial" pitchFamily="34" charset="0"/>
-                <a:ea typeface="Arial" pitchFamily="34" charset="-122"/>
-                <a:cs typeface="Arial" pitchFamily="34" charset="-120"/>
-              </a:rPr>
-              <a:t>Wrapper evaporates in codegen</a:t>
-            </a:r>
-            <a:endParaRPr lang="en-US" sz="1350" dirty="0"/>
-          </a:p>
-        </p:txBody>
-      </p:sp>
-      <p:sp>
-        <p:nvSpPr>
-          <p:cNvPr id="29" name="Text 27"/>
-          <p:cNvSpPr/>
-          <p:nvPr/>
-        </p:nvSpPr>
-        <p:spPr>
-          <a:xfrm>
-            <a:off x="5905500" y="3505200"/>
-            <a:ext cx="2857500" cy="737146"/>
-          </a:xfrm>
-          <a:prstGeom prst="roundRect">
-            <a:avLst>
-              <a:gd name="adj" fmla="val 10337"/>
-            </a:avLst>
-          </a:prstGeom>
-          <a:solidFill>
-            <a:srgbClr val="2D2D44"/>
-          </a:solidFill>
-          <a:ln/>
-        </p:spPr>
-        <p:txBody>
-          <a:bodyPr wrap="square" rtlCol="0" anchor="ctr"/>
-          <a:lstStyle/>
-          <a:p>
-            <a:pPr marL="0" indent="0">
-              <a:buNone/>
-            </a:pPr>
-            <a:endParaRPr lang="en-US" dirty="0"/>
-          </a:p>
-        </p:txBody>
-      </p:sp>
-      <p:sp>
-        <p:nvSpPr>
-          <p:cNvPr id="30" name="Text 28"/>
-          <p:cNvSpPr/>
-          <p:nvPr/>
-        </p:nvSpPr>
-        <p:spPr>
-          <a:xfrm>
-            <a:off x="6076950" y="3638550"/>
-            <a:ext cx="2564892" cy="146596"/>
-          </a:xfrm>
-          <a:prstGeom prst="rect">
-            <a:avLst/>
-          </a:prstGeom>
-          <a:noFill/>
-          <a:ln/>
-        </p:spPr>
-        <p:txBody>
-          <a:bodyPr wrap="square" lIns="0" tIns="0" rIns="0" bIns="0" rtlCol="0" anchor="t"/>
-          <a:lstStyle/>
-          <a:p>
-            <a:pPr marL="0" indent="0" algn="l">
-              <a:lnSpc>
-                <a:spcPts val="1155"/>
-              </a:lnSpc>
-              <a:spcAft>
-                <a:spcPts val="450"/>
-              </a:spcAft>
-              <a:buNone/>
-            </a:pPr>
-            <a:r>
-              <a:rPr lang="en-US" sz="825" b="1" dirty="0">
-                <a:solidFill>
-                  <a:srgbClr val="E63946"/>
-                </a:solidFill>
-                <a:latin typeface="Arial" pitchFamily="34" charset="0"/>
-                <a:ea typeface="Arial" pitchFamily="34" charset="-122"/>
-                <a:cs typeface="Arial" pitchFamily="34" charset="-120"/>
-              </a:rPr>
-              <a:t>Exception: Checked Arithmetic</a:t>
-            </a:r>
-            <a:endParaRPr lang="en-US" sz="825" dirty="0"/>
-          </a:p>
-        </p:txBody>
-      </p:sp>
-      <p:sp>
-        <p:nvSpPr>
-          <p:cNvPr id="31" name="Text 29"/>
-          <p:cNvSpPr/>
-          <p:nvPr/>
-        </p:nvSpPr>
-        <p:spPr>
-          <a:xfrm>
-            <a:off x="6076950" y="3842296"/>
-            <a:ext cx="2564892" cy="266700"/>
-          </a:xfrm>
-          <a:prstGeom prst="rect">
-            <a:avLst/>
-          </a:prstGeom>
-          <a:noFill/>
-          <a:ln/>
-        </p:spPr>
-        <p:txBody>
-          <a:bodyPr wrap="square" lIns="0" tIns="0" rIns="0" bIns="0" rtlCol="0" anchor="t"/>
-          <a:lstStyle/>
-          <a:p>
-            <a:pPr marL="0" indent="0" algn="l">
-              <a:lnSpc>
-                <a:spcPts val="1050"/>
-              </a:lnSpc>
-              <a:buNone/>
-            </a:pPr>
-            <a:r>
-              <a:rPr lang="en-US" sz="750" dirty="0">
-                <a:solidFill>
-                  <a:srgbClr val="A8A8B8"/>
-                </a:solidFill>
-                <a:latin typeface="Arial" pitchFamily="34" charset="0"/>
-                <a:ea typeface="Arial" pitchFamily="34" charset="-122"/>
-                <a:cs typeface="Arial" pitchFamily="34" charset="-120"/>
-              </a:rPr>
-              <a:t>Overflow detection adds ~10× cost. Use UncheckedOpPolicy for hot paths.</a:t>
-            </a:r>
-            <a:endParaRPr lang="en-US" sz="750" dirty="0"/>
+          <p:cNvPr id="3" name="TextBox 2"/>
+          <p:cNvSpPr txBox="1"/>
+          <p:nvPr/>
+        </p:nvSpPr>
+        <p:spPr>
+          <a:xfrm>
+            <a:off x="731520" y="1463040"/>
+            <a:ext cx="7780784" cy="2308324"/>
+          </a:xfrm>
+          <a:prstGeom prst="rect">
+            <a:avLst/>
+          </a:prstGeom>
+          <a:noFill/>
+        </p:spPr>
+        <p:txBody>
+          <a:bodyPr wrap="none">
+            <a:spAutoFit/>
+          </a:bodyPr>
+          <a:lstStyle/>
+          <a:p>
+            <a:pPr>
+              <a:defRPr sz="2400"/>
+            </a:pPr>
+            <a:r>
+              <a:rPr dirty="0">
+                <a:solidFill>
+                  <a:schemeClr val="bg2"/>
+                </a:solidFill>
+              </a:rPr>
+              <a:t>Designed to be zero/near-zero overhead in optimized builds:</a:t>
+            </a:r>
+          </a:p>
+          <a:p>
+            <a:pPr>
+              <a:defRPr sz="2000"/>
+            </a:pPr>
+            <a:r>
+              <a:rPr dirty="0">
+                <a:solidFill>
+                  <a:schemeClr val="bg2"/>
+                </a:solidFill>
+              </a:rPr>
+              <a:t>• Single int member (same size as raw int)</a:t>
+            </a:r>
+          </a:p>
+          <a:p>
+            <a:pPr>
+              <a:defRPr sz="2000"/>
+            </a:pPr>
+            <a:r>
+              <a:rPr dirty="0">
+                <a:solidFill>
+                  <a:schemeClr val="bg2"/>
+                </a:solidFill>
+              </a:rPr>
+              <a:t>• Tag exists only at compile time</a:t>
+            </a:r>
+          </a:p>
+          <a:p>
+            <a:pPr>
+              <a:defRPr sz="2000"/>
+            </a:pPr>
+            <a:r>
+              <a:rPr dirty="0">
+                <a:solidFill>
+                  <a:schemeClr val="bg2"/>
+                </a:solidFill>
+              </a:rPr>
+              <a:t>• Thin wrapper should inline away under -O2/-O3</a:t>
+            </a:r>
+          </a:p>
+          <a:p>
+            <a:pPr>
+              <a:defRPr sz="2000"/>
+            </a:pPr>
+            <a:r>
+              <a:rPr dirty="0">
+                <a:solidFill>
+                  <a:schemeClr val="bg2"/>
+                </a:solidFill>
+              </a:rPr>
+              <a:t>• Verify with Compiler Explorer or a micro-benchmark if this is a hot path</a:t>
+            </a:r>
+          </a:p>
+          <a:p>
+            <a:pPr>
+              <a:defRPr sz="2000"/>
+            </a:pPr>
+            <a:endParaRPr dirty="0">
+              <a:solidFill>
+                <a:schemeClr val="bg2"/>
+              </a:solidFill>
+            </a:endParaRPr>
+          </a:p>
+          <a:p>
+            <a:pPr>
+              <a:defRPr sz="2000"/>
+            </a:pPr>
+            <a:r>
+              <a:rPr dirty="0">
+                <a:solidFill>
+                  <a:schemeClr val="bg2"/>
+                </a:solidFill>
+              </a:rPr>
+              <a:t>Note: checked policies (e.g., overflow detection) add runtime work.</a:t>
+            </a:r>
           </a:p>
         </p:txBody>
       </p:sp>
@@ -4547,37 +3409,27 @@
         </p:nvSpPr>
         <p:spPr>
           <a:xfrm>
-            <a:off x="495300" y="2033736"/>
-            <a:ext cx="1126998" cy="119955"/>
-          </a:xfrm>
-          <a:prstGeom prst="rect">
-            <a:avLst/>
-          </a:prstGeom>
-          <a:noFill/>
-          <a:ln/>
-        </p:spPr>
-        <p:txBody>
-          <a:bodyPr wrap="square" lIns="0" tIns="0" rIns="0" bIns="0" rtlCol="0" anchor="t"/>
-          <a:lstStyle/>
-          <a:p>
-            <a:pPr marL="0" indent="0" algn="l">
-              <a:lnSpc>
-                <a:spcPts val="945"/>
-              </a:lnSpc>
-              <a:buNone/>
-            </a:pPr>
-            <a:r>
-              <a:rPr lang="en-US" sz="675" dirty="0">
-                <a:solidFill>
-                  <a:srgbClr val="A8A8B8"/>
-                </a:solidFill>
-                <a:latin typeface="Arial" pitchFamily="34" charset="0"/>
-                <a:ea typeface="Arial" pitchFamily="34" charset="-122"/>
-                <a:cs typeface="Arial" pitchFamily="34" charset="-120"/>
-              </a:rPr>
-              <a:t>Zero overhead</a:t>
-            </a:r>
-            <a:endParaRPr lang="en-US" sz="675" dirty="0"/>
+            <a:off x="480726" y="1944897"/>
+            <a:ext cx="1126999" cy="284995"/>
+          </a:xfrm>
+          <a:prstGeom prst="rect">
+            <a:avLst/>
+          </a:prstGeom>
+          <a:noFill/>
+          <a:ln/>
+        </p:spPr>
+        <p:txBody>
+          <a:bodyPr wrap="square" lIns="0" tIns="0" rIns="0" bIns="0" rtlCol="0" anchor="t"/>
+          <a:lstStyle/>
+          <a:p>
+            <a:r>
+              <a:rPr sz="800" dirty="0">
+                <a:solidFill>
+                  <a:schemeClr val="bg2"/>
+                </a:solidFill>
+              </a:rPr>
+              <a:t>Designed for near-zero overhead</a:t>
+            </a:r>
           </a:p>
         </p:txBody>
       </p:sp>
@@ -6736,39 +5588,26 @@
         <p:spPr>
           <a:xfrm>
             <a:off x="297180" y="3915519"/>
-            <a:ext cx="8549640" cy="146596"/>
-          </a:xfrm>
-          <a:prstGeom prst="rect">
-            <a:avLst/>
-          </a:prstGeom>
-          <a:noFill/>
-          <a:ln/>
-        </p:spPr>
-        <p:txBody>
-          <a:bodyPr wrap="square" lIns="0" tIns="0" rIns="0" bIns="0" rtlCol="0" anchor="t"/>
-          <a:lstStyle/>
-          <a:p>
-            <a:pPr marL="0" indent="0" algn="ctr">
-              <a:lnSpc>
-                <a:spcPts val="1155"/>
-              </a:lnSpc>
-              <a:spcBef>
-                <a:spcPts val="600"/>
-              </a:spcBef>
-              <a:buNone/>
-            </a:pPr>
-            <a:r>
-              <a:rPr lang="en-US" sz="825" dirty="0">
-                <a:solidFill>
-                  <a:srgbClr val="A8A8B8"/>
-                </a:solidFill>
-                <a:latin typeface="Arial" pitchFamily="34" charset="0"/>
-                <a:ea typeface="Arial" pitchFamily="34" charset="-122"/>
-                <a:cs typeface="Arial" pitchFamily="34" charset="-120"/>
-              </a:rPr>
-              <a:t>All achieve the core goal: compile-time type distinction with zero overhead.</a:t>
-            </a:r>
-            <a:endParaRPr lang="en-US" sz="825" dirty="0"/>
+            <a:ext cx="8549640" cy="548108"/>
+          </a:xfrm>
+          <a:prstGeom prst="rect">
+            <a:avLst/>
+          </a:prstGeom>
+          <a:noFill/>
+          <a:ln/>
+        </p:spPr>
+        <p:txBody>
+          <a:bodyPr wrap="square" lIns="0" tIns="0" rIns="0" bIns="0" rtlCol="0" anchor="t"/>
+          <a:lstStyle/>
+          <a:p>
+            <a:r>
+              <a:rPr dirty="0">
+                <a:solidFill>
+                  <a:schemeClr val="bg2"/>
+                </a:solidFill>
+              </a:rPr>
+              <a:t>All achieve the core goal: compile-time type distinction with minimal overhead (verify with your toolchain).</a:t>
+            </a:r>
           </a:p>
         </p:txBody>
       </p:sp>
@@ -13674,40 +12513,27 @@
         </p:nvSpPr>
         <p:spPr>
           <a:xfrm>
-            <a:off x="6438900" y="3473648"/>
-            <a:ext cx="2215134" cy="146596"/>
-          </a:xfrm>
-          <a:prstGeom prst="rect">
-            <a:avLst/>
-          </a:prstGeom>
-          <a:noFill/>
-          <a:ln/>
-        </p:spPr>
-        <p:txBody>
-          <a:bodyPr wrap="square" lIns="0" tIns="0" rIns="0" bIns="0" rtlCol="0" anchor="t"/>
-          <a:lstStyle/>
-          <a:p>
-            <a:pPr marL="0" indent="0" algn="l">
-              <a:lnSpc>
-                <a:spcPts val="1155"/>
-              </a:lnSpc>
-              <a:spcAft>
-                <a:spcPts val="300"/>
-              </a:spcAft>
-              <a:buNone/>
-            </a:pPr>
-            <a:r>
-              <a:rPr lang="en-US" sz="825" b="1" dirty="0">
-                <a:solidFill>
-                  <a:srgbClr val="2A9D8F"/>
-                </a:solidFill>
-                <a:latin typeface="Arial" pitchFamily="34" charset="0"/>
-                <a:ea typeface="Arial" pitchFamily="34" charset="-122"/>
-                <a:cs typeface="Arial" pitchFamily="34" charset="-120"/>
-              </a:rPr>
-              <a:t>Zero Overhead</a:t>
-            </a:r>
-            <a:endParaRPr lang="en-US" sz="825" dirty="0"/>
+            <a:off x="6438900" y="3419226"/>
+            <a:ext cx="3254290" cy="299334"/>
+          </a:xfrm>
+          <a:prstGeom prst="rect">
+            <a:avLst/>
+          </a:prstGeom>
+          <a:noFill/>
+          <a:ln/>
+        </p:spPr>
+        <p:txBody>
+          <a:bodyPr wrap="square" lIns="0" tIns="0" rIns="0" bIns="0" rtlCol="0" anchor="t"/>
+          <a:lstStyle/>
+          <a:p>
+            <a:r>
+              <a:rPr sz="1200" dirty="0">
+                <a:solidFill>
+                  <a:schemeClr val="bg2"/>
+                </a:solidFill>
+              </a:rPr>
+              <a:t>Designed for near-zero overhead</a:t>
+            </a:r>
           </a:p>
         </p:txBody>
       </p:sp>
